--- a/Course content/Slides/Topic 2 A ML project.pptx
+++ b/Course content/Slides/Topic 2 A ML project.pptx
@@ -278,7 +278,7 @@
           <a:p>
             <a:fld id="{A7DB5662-7327-465C-9A70-AD96B7A8D67A}" type="datetimeFigureOut">
               <a:rPr lang="en-US" smtClean="0"/>
-              <a:t>9/29/2022</a:t>
+              <a:t>10/18/2022</a:t>
             </a:fld>
             <a:endParaRPr lang="en-US"/>
           </a:p>
@@ -476,7 +476,7 @@
           <a:p>
             <a:fld id="{A7DB5662-7327-465C-9A70-AD96B7A8D67A}" type="datetimeFigureOut">
               <a:rPr lang="en-US" smtClean="0"/>
-              <a:t>9/29/2022</a:t>
+              <a:t>10/18/2022</a:t>
             </a:fld>
             <a:endParaRPr lang="en-US"/>
           </a:p>
@@ -684,7 +684,7 @@
           <a:p>
             <a:fld id="{A7DB5662-7327-465C-9A70-AD96B7A8D67A}" type="datetimeFigureOut">
               <a:rPr lang="en-US" smtClean="0"/>
-              <a:t>9/29/2022</a:t>
+              <a:t>10/18/2022</a:t>
             </a:fld>
             <a:endParaRPr lang="en-US"/>
           </a:p>
@@ -882,7 +882,7 @@
           <a:p>
             <a:fld id="{A7DB5662-7327-465C-9A70-AD96B7A8D67A}" type="datetimeFigureOut">
               <a:rPr lang="en-US" smtClean="0"/>
-              <a:t>9/29/2022</a:t>
+              <a:t>10/18/2022</a:t>
             </a:fld>
             <a:endParaRPr lang="en-US"/>
           </a:p>
@@ -1157,7 +1157,7 @@
           <a:p>
             <a:fld id="{A7DB5662-7327-465C-9A70-AD96B7A8D67A}" type="datetimeFigureOut">
               <a:rPr lang="en-US" smtClean="0"/>
-              <a:t>9/29/2022</a:t>
+              <a:t>10/18/2022</a:t>
             </a:fld>
             <a:endParaRPr lang="en-US"/>
           </a:p>
@@ -1422,7 +1422,7 @@
           <a:p>
             <a:fld id="{A7DB5662-7327-465C-9A70-AD96B7A8D67A}" type="datetimeFigureOut">
               <a:rPr lang="en-US" smtClean="0"/>
-              <a:t>9/29/2022</a:t>
+              <a:t>10/18/2022</a:t>
             </a:fld>
             <a:endParaRPr lang="en-US"/>
           </a:p>
@@ -1834,7 +1834,7 @@
           <a:p>
             <a:fld id="{A7DB5662-7327-465C-9A70-AD96B7A8D67A}" type="datetimeFigureOut">
               <a:rPr lang="en-US" smtClean="0"/>
-              <a:t>9/29/2022</a:t>
+              <a:t>10/18/2022</a:t>
             </a:fld>
             <a:endParaRPr lang="en-US"/>
           </a:p>
@@ -1975,7 +1975,7 @@
           <a:p>
             <a:fld id="{A7DB5662-7327-465C-9A70-AD96B7A8D67A}" type="datetimeFigureOut">
               <a:rPr lang="en-US" smtClean="0"/>
-              <a:t>9/29/2022</a:t>
+              <a:t>10/18/2022</a:t>
             </a:fld>
             <a:endParaRPr lang="en-US"/>
           </a:p>
@@ -2088,7 +2088,7 @@
           <a:p>
             <a:fld id="{A7DB5662-7327-465C-9A70-AD96B7A8D67A}" type="datetimeFigureOut">
               <a:rPr lang="en-US" smtClean="0"/>
-              <a:t>9/29/2022</a:t>
+              <a:t>10/18/2022</a:t>
             </a:fld>
             <a:endParaRPr lang="en-US"/>
           </a:p>
@@ -2399,7 +2399,7 @@
           <a:p>
             <a:fld id="{A7DB5662-7327-465C-9A70-AD96B7A8D67A}" type="datetimeFigureOut">
               <a:rPr lang="en-US" smtClean="0"/>
-              <a:t>9/29/2022</a:t>
+              <a:t>10/18/2022</a:t>
             </a:fld>
             <a:endParaRPr lang="en-US"/>
           </a:p>
@@ -2687,7 +2687,7 @@
           <a:p>
             <a:fld id="{A7DB5662-7327-465C-9A70-AD96B7A8D67A}" type="datetimeFigureOut">
               <a:rPr lang="en-US" smtClean="0"/>
-              <a:t>9/29/2022</a:t>
+              <a:t>10/18/2022</a:t>
             </a:fld>
             <a:endParaRPr lang="en-US"/>
           </a:p>
@@ -2928,7 +2928,7 @@
           <a:p>
             <a:fld id="{A7DB5662-7327-465C-9A70-AD96B7A8D67A}" type="datetimeFigureOut">
               <a:rPr lang="en-US" smtClean="0"/>
-              <a:t>9/29/2022</a:t>
+              <a:t>10/18/2022</a:t>
             </a:fld>
             <a:endParaRPr lang="en-US"/>
           </a:p>
@@ -3393,7 +3393,7 @@
             </a:r>
             <a:r>
               <a:rPr lang="en-US" sz="4000" dirty="0"/>
-              <a:t>A Machine Learning project? </a:t>
+              <a:t>A Machine Learning project </a:t>
             </a:r>
             <a:br>
               <a:rPr lang="en-US" sz="4000" dirty="0"/>
@@ -21564,8 +21564,8 @@
           </a:p>
           <a:p>
             <a:pPr marL="914400" lvl="1" indent="-457200" algn="l">
-              <a:buFont typeface="Wingdings" panose="05000000000000000000" pitchFamily="2" charset="2"/>
-              <a:buChar char="§"/>
+              <a:buFont typeface="+mj-lt"/>
+              <a:buAutoNum type="arabicPeriod"/>
             </a:pPr>
             <a:r>
               <a:rPr lang="en-US" sz="2400" dirty="0">
@@ -21577,21 +21577,21 @@
           </a:p>
           <a:p>
             <a:pPr marL="914400" lvl="1" indent="-457200" algn="l">
-              <a:buFont typeface="Wingdings" panose="05000000000000000000" pitchFamily="2" charset="2"/>
-              <a:buChar char="§"/>
+              <a:buFont typeface="+mj-lt"/>
+              <a:buAutoNum type="arabicPeriod"/>
             </a:pPr>
             <a:r>
               <a:rPr lang="en-US" sz="2400" dirty="0">
                 <a:latin typeface="+mj-lt"/>
                 <a:cs typeface="Times New Roman" panose="02020603050405020304" pitchFamily="18" charset="0"/>
               </a:rPr>
-              <a:t>Set up your environment</a:t>
+              <a:t>Define your working environment</a:t>
             </a:r>
           </a:p>
           <a:p>
             <a:pPr marL="914400" lvl="1" indent="-457200" algn="l">
-              <a:buFont typeface="Wingdings" panose="05000000000000000000" pitchFamily="2" charset="2"/>
-              <a:buChar char="§"/>
+              <a:buFont typeface="+mj-lt"/>
+              <a:buAutoNum type="arabicPeriod"/>
             </a:pPr>
             <a:r>
               <a:rPr lang="en-US" sz="2400" dirty="0">
@@ -21602,25 +21602,25 @@
             </a:r>
           </a:p>
           <a:p>
-            <a:pPr marL="914400" lvl="1" indent="-457200" algn="l">
-              <a:buFont typeface="Wingdings" panose="05000000000000000000" pitchFamily="2" charset="2"/>
-              <a:buChar char="§"/>
+            <a:pPr marL="1371600" lvl="2" indent="-457200" algn="l">
+              <a:buFont typeface="+mj-lt"/>
+              <a:buAutoNum type="arabicPeriod"/>
             </a:pPr>
             <a:r>
-              <a:rPr lang="en-US" sz="2400" dirty="0">
+              <a:rPr lang="en-US" sz="2200" dirty="0">
                 <a:latin typeface="+mj-lt"/>
                 <a:cs typeface="Times New Roman" panose="02020603050405020304" pitchFamily="18" charset="0"/>
               </a:rPr>
-              <a:t>Setting up</a:t>
+              <a:t>Set up</a:t>
             </a:r>
           </a:p>
           <a:p>
-            <a:pPr marL="914400" lvl="1" indent="-457200" algn="l">
-              <a:buFont typeface="Wingdings" panose="05000000000000000000" pitchFamily="2" charset="2"/>
-              <a:buChar char="§"/>
+            <a:pPr marL="1371600" lvl="2" indent="-457200" algn="l">
+              <a:buFont typeface="+mj-lt"/>
+              <a:buAutoNum type="arabicPeriod"/>
             </a:pPr>
             <a:r>
-              <a:rPr lang="en-US" sz="2400" dirty="0">
+              <a:rPr lang="en-US" sz="2200" dirty="0">
                 <a:latin typeface="+mj-lt"/>
                 <a:cs typeface="Times New Roman" panose="02020603050405020304" pitchFamily="18" charset="0"/>
               </a:rPr>
@@ -21628,12 +21628,12 @@
             </a:r>
           </a:p>
           <a:p>
-            <a:pPr marL="914400" lvl="1" indent="-457200" algn="l">
-              <a:buFont typeface="Wingdings" panose="05000000000000000000" pitchFamily="2" charset="2"/>
-              <a:buChar char="§"/>
+            <a:pPr marL="1371600" lvl="2" indent="-457200" algn="l">
+              <a:buFont typeface="+mj-lt"/>
+              <a:buAutoNum type="arabicPeriod"/>
             </a:pPr>
             <a:r>
-              <a:rPr lang="en-US" sz="2400" dirty="0">
+              <a:rPr lang="en-US" sz="2200" dirty="0">
                 <a:latin typeface="+mj-lt"/>
                 <a:cs typeface="Times New Roman" panose="02020603050405020304" pitchFamily="18" charset="0"/>
               </a:rPr>
@@ -21641,12 +21641,12 @@
             </a:r>
           </a:p>
           <a:p>
-            <a:pPr marL="914400" lvl="1" indent="-457200" algn="l">
-              <a:buFont typeface="Wingdings" panose="05000000000000000000" pitchFamily="2" charset="2"/>
-              <a:buChar char="§"/>
+            <a:pPr marL="1371600" lvl="2" indent="-457200" algn="l">
+              <a:buFont typeface="+mj-lt"/>
+              <a:buAutoNum type="arabicPeriod"/>
             </a:pPr>
             <a:r>
-              <a:rPr lang="en-US" sz="2400" dirty="0">
+              <a:rPr lang="en-US" sz="2200" dirty="0">
                 <a:latin typeface="+mj-lt"/>
                 <a:cs typeface="Times New Roman" panose="02020603050405020304" pitchFamily="18" charset="0"/>
               </a:rPr>
@@ -21654,12 +21654,12 @@
             </a:r>
           </a:p>
           <a:p>
-            <a:pPr marL="914400" lvl="1" indent="-457200" algn="l">
-              <a:buFont typeface="Wingdings" panose="05000000000000000000" pitchFamily="2" charset="2"/>
-              <a:buChar char="§"/>
+            <a:pPr marL="1371600" lvl="2" indent="-457200" algn="l">
+              <a:buFont typeface="+mj-lt"/>
+              <a:buAutoNum type="arabicPeriod"/>
             </a:pPr>
             <a:r>
-              <a:rPr lang="en-US" sz="2400" dirty="0">
+              <a:rPr lang="en-US" sz="2200" dirty="0">
                 <a:latin typeface="+mj-lt"/>
                 <a:cs typeface="Times New Roman" panose="02020603050405020304" pitchFamily="18" charset="0"/>
               </a:rPr>
@@ -21667,12 +21667,12 @@
             </a:r>
           </a:p>
           <a:p>
-            <a:pPr marL="914400" lvl="1" indent="-457200" algn="l">
-              <a:buFont typeface="Wingdings" panose="05000000000000000000" pitchFamily="2" charset="2"/>
-              <a:buChar char="§"/>
+            <a:pPr marL="1371600" lvl="2" indent="-457200" algn="l">
+              <a:buFont typeface="+mj-lt"/>
+              <a:buAutoNum type="arabicPeriod"/>
             </a:pPr>
             <a:r>
-              <a:rPr lang="en-US" sz="2400" dirty="0">
+              <a:rPr lang="en-US" sz="2200" dirty="0">
                 <a:latin typeface="+mj-lt"/>
                 <a:cs typeface="Times New Roman" panose="02020603050405020304" pitchFamily="18" charset="0"/>
               </a:rPr>
@@ -21680,12 +21680,12 @@
             </a:r>
           </a:p>
           <a:p>
-            <a:pPr marL="914400" lvl="1" indent="-457200" algn="l">
-              <a:buFont typeface="Wingdings" panose="05000000000000000000" pitchFamily="2" charset="2"/>
-              <a:buChar char="§"/>
+            <a:pPr marL="1371600" lvl="2" indent="-457200" algn="l">
+              <a:buFont typeface="+mj-lt"/>
+              <a:buAutoNum type="arabicPeriod"/>
             </a:pPr>
             <a:r>
-              <a:rPr lang="en-US" sz="2400" dirty="0">
+              <a:rPr lang="en-US" sz="2200" dirty="0">
                 <a:latin typeface="+mj-lt"/>
                 <a:cs typeface="Times New Roman" panose="02020603050405020304" pitchFamily="18" charset="0"/>
               </a:rPr>
@@ -23787,7 +23787,7 @@
           <a:p>
             <a:r>
               <a:rPr lang="en-US" sz="4000" dirty="0"/>
-              <a:t>Set up your environment</a:t>
+              <a:t>Define your working environment</a:t>
             </a:r>
           </a:p>
         </p:txBody>
@@ -24336,7 +24336,7 @@
               <a:rPr lang="en-US" sz="2400" dirty="0">
                 <a:latin typeface="+mj-lt"/>
               </a:rPr>
-              <a:t>Setting up (pre-define parameters, write useful functions, </a:t>
+              <a:t>Set up (pre-define parameters, write useful functions, </a:t>
             </a:r>
             <a:r>
               <a:rPr lang="en-US" sz="2400" dirty="0" err="1">
@@ -25496,7 +25496,7 @@
               <a:rPr lang="en-US" sz="2000" dirty="0">
                 <a:latin typeface="+mj-lt"/>
               </a:rPr>
-              <a:t>Download notebooks from my </a:t>
+              <a:t>Open notebooks from my </a:t>
             </a:r>
             <a:r>
               <a:rPr lang="en-US" sz="2000" dirty="0" err="1">
@@ -25521,20 +25521,7 @@
               <a:rPr lang="en-US" sz="2000" dirty="0">
                 <a:latin typeface="+mj-lt"/>
               </a:rPr>
-              <a:t>) to your google drive</a:t>
-            </a:r>
-          </a:p>
-          <a:p>
-            <a:pPr lvl="1">
-              <a:lnSpc>
-                <a:spcPct val="100000"/>
-              </a:lnSpc>
-            </a:pPr>
-            <a:r>
-              <a:rPr lang="en-US" sz="2000" dirty="0">
-                <a:latin typeface="+mj-lt"/>
-              </a:rPr>
-              <a:t>Open the notebooks in Google </a:t>
+              <a:t>) in your Google </a:t>
             </a:r>
             <a:r>
               <a:rPr lang="en-US" sz="2000" dirty="0" err="1">
@@ -25579,7 +25566,7 @@
               <a:rPr lang="en-US" sz="2400" dirty="0">
                 <a:latin typeface="+mj-lt"/>
               </a:rPr>
-              <a:t>Let’s do so and take a look at this comprehensive example on housing prices in the sunny State of California (</a:t>
+              <a:t>Let’s take a look at this comprehensive example on housing prices in the sunny State of California (</a:t>
             </a:r>
             <a:r>
               <a:rPr lang="en-US" sz="2400" i="1" dirty="0">

--- a/Course content/Slides/Topic 2 A ML project.pptx
+++ b/Course content/Slides/Topic 2 A ML project.pptx
@@ -129,6 +129,35 @@
     </p:ext>
   </p:extLst>
 </p:presentation>
+</file>
+
+<file path=ppt/changesInfos/changesInfo1.xml><?xml version="1.0" encoding="utf-8"?>
+<pc:chgInfo xmlns:a="http://schemas.openxmlformats.org/drawingml/2006/main" xmlns:r="http://schemas.openxmlformats.org/officeDocument/2006/relationships" xmlns:ac="http://schemas.microsoft.com/office/drawing/2013/main/command" xmlns:pc="http://schemas.microsoft.com/office/powerpoint/2013/main/command">
+  <pc:docChgLst>
+    <pc:chgData name="Javier Bas Vicente" userId="96bf8a96-3310-496c-8c7e-8a087f977faa" providerId="ADAL" clId="{6D61AA64-0E28-439B-A63D-609F3C713282}"/>
+    <pc:docChg chg="modSld">
+      <pc:chgData name="Javier Bas Vicente" userId="96bf8a96-3310-496c-8c7e-8a087f977faa" providerId="ADAL" clId="{6D61AA64-0E28-439B-A63D-609F3C713282}" dt="2023-10-19T15:10:10.842" v="3" actId="20577"/>
+      <pc:docMkLst>
+        <pc:docMk/>
+      </pc:docMkLst>
+      <pc:sldChg chg="modSp mod">
+        <pc:chgData name="Javier Bas Vicente" userId="96bf8a96-3310-496c-8c7e-8a087f977faa" providerId="ADAL" clId="{6D61AA64-0E28-439B-A63D-609F3C713282}" dt="2023-10-19T15:10:10.842" v="3" actId="20577"/>
+        <pc:sldMkLst>
+          <pc:docMk/>
+          <pc:sldMk cId="2149080833" sldId="278"/>
+        </pc:sldMkLst>
+        <pc:spChg chg="mod">
+          <ac:chgData name="Javier Bas Vicente" userId="96bf8a96-3310-496c-8c7e-8a087f977faa" providerId="ADAL" clId="{6D61AA64-0E28-439B-A63D-609F3C713282}" dt="2023-10-19T15:10:10.842" v="3" actId="20577"/>
+          <ac:spMkLst>
+            <pc:docMk/>
+            <pc:sldMk cId="2149080833" sldId="278"/>
+            <ac:spMk id="3" creationId="{6866AA87-E000-52D2-F65D-4B414B00BBE5}"/>
+          </ac:spMkLst>
+        </pc:spChg>
+      </pc:sldChg>
+    </pc:docChg>
+  </pc:docChgLst>
+</pc:chgInfo>
 </file>
 
 <file path=ppt/slideLayouts/slideLayout1.xml><?xml version="1.0" encoding="utf-8"?>
@@ -278,7 +307,7 @@
           <a:p>
             <a:fld id="{A7DB5662-7327-465C-9A70-AD96B7A8D67A}" type="datetimeFigureOut">
               <a:rPr lang="en-US" smtClean="0"/>
-              <a:t>10/18/2022</a:t>
+              <a:t>10/19/2023</a:t>
             </a:fld>
             <a:endParaRPr lang="en-US"/>
           </a:p>
@@ -476,7 +505,7 @@
           <a:p>
             <a:fld id="{A7DB5662-7327-465C-9A70-AD96B7A8D67A}" type="datetimeFigureOut">
               <a:rPr lang="en-US" smtClean="0"/>
-              <a:t>10/18/2022</a:t>
+              <a:t>10/19/2023</a:t>
             </a:fld>
             <a:endParaRPr lang="en-US"/>
           </a:p>
@@ -684,7 +713,7 @@
           <a:p>
             <a:fld id="{A7DB5662-7327-465C-9A70-AD96B7A8D67A}" type="datetimeFigureOut">
               <a:rPr lang="en-US" smtClean="0"/>
-              <a:t>10/18/2022</a:t>
+              <a:t>10/19/2023</a:t>
             </a:fld>
             <a:endParaRPr lang="en-US"/>
           </a:p>
@@ -882,7 +911,7 @@
           <a:p>
             <a:fld id="{A7DB5662-7327-465C-9A70-AD96B7A8D67A}" type="datetimeFigureOut">
               <a:rPr lang="en-US" smtClean="0"/>
-              <a:t>10/18/2022</a:t>
+              <a:t>10/19/2023</a:t>
             </a:fld>
             <a:endParaRPr lang="en-US"/>
           </a:p>
@@ -1157,7 +1186,7 @@
           <a:p>
             <a:fld id="{A7DB5662-7327-465C-9A70-AD96B7A8D67A}" type="datetimeFigureOut">
               <a:rPr lang="en-US" smtClean="0"/>
-              <a:t>10/18/2022</a:t>
+              <a:t>10/19/2023</a:t>
             </a:fld>
             <a:endParaRPr lang="en-US"/>
           </a:p>
@@ -1422,7 +1451,7 @@
           <a:p>
             <a:fld id="{A7DB5662-7327-465C-9A70-AD96B7A8D67A}" type="datetimeFigureOut">
               <a:rPr lang="en-US" smtClean="0"/>
-              <a:t>10/18/2022</a:t>
+              <a:t>10/19/2023</a:t>
             </a:fld>
             <a:endParaRPr lang="en-US"/>
           </a:p>
@@ -1834,7 +1863,7 @@
           <a:p>
             <a:fld id="{A7DB5662-7327-465C-9A70-AD96B7A8D67A}" type="datetimeFigureOut">
               <a:rPr lang="en-US" smtClean="0"/>
-              <a:t>10/18/2022</a:t>
+              <a:t>10/19/2023</a:t>
             </a:fld>
             <a:endParaRPr lang="en-US"/>
           </a:p>
@@ -1975,7 +2004,7 @@
           <a:p>
             <a:fld id="{A7DB5662-7327-465C-9A70-AD96B7A8D67A}" type="datetimeFigureOut">
               <a:rPr lang="en-US" smtClean="0"/>
-              <a:t>10/18/2022</a:t>
+              <a:t>10/19/2023</a:t>
             </a:fld>
             <a:endParaRPr lang="en-US"/>
           </a:p>
@@ -2088,7 +2117,7 @@
           <a:p>
             <a:fld id="{A7DB5662-7327-465C-9A70-AD96B7A8D67A}" type="datetimeFigureOut">
               <a:rPr lang="en-US" smtClean="0"/>
-              <a:t>10/18/2022</a:t>
+              <a:t>10/19/2023</a:t>
             </a:fld>
             <a:endParaRPr lang="en-US"/>
           </a:p>
@@ -2399,7 +2428,7 @@
           <a:p>
             <a:fld id="{A7DB5662-7327-465C-9A70-AD96B7A8D67A}" type="datetimeFigureOut">
               <a:rPr lang="en-US" smtClean="0"/>
-              <a:t>10/18/2022</a:t>
+              <a:t>10/19/2023</a:t>
             </a:fld>
             <a:endParaRPr lang="en-US"/>
           </a:p>
@@ -2687,7 +2716,7 @@
           <a:p>
             <a:fld id="{A7DB5662-7327-465C-9A70-AD96B7A8D67A}" type="datetimeFigureOut">
               <a:rPr lang="en-US" smtClean="0"/>
-              <a:t>10/18/2022</a:t>
+              <a:t>10/19/2023</a:t>
             </a:fld>
             <a:endParaRPr lang="en-US"/>
           </a:p>
@@ -2928,7 +2957,7 @@
           <a:p>
             <a:fld id="{A7DB5662-7327-465C-9A70-AD96B7A8D67A}" type="datetimeFigureOut">
               <a:rPr lang="en-US" smtClean="0"/>
-              <a:t>10/18/2022</a:t>
+              <a:t>10/19/2023</a:t>
             </a:fld>
             <a:endParaRPr lang="en-US"/>
           </a:p>
@@ -3476,11 +3505,11 @@
           </a:p>
           <a:p>
             <a:r>
-              <a:rPr lang="es-ES" sz="2000" dirty="0">
+              <a:rPr lang="es-ES" sz="2000">
                 <a:latin typeface="+mj-lt"/>
                 <a:cs typeface="Times New Roman" panose="02020603050405020304" pitchFamily="18" charset="0"/>
               </a:rPr>
-              <a:t>2022/2023</a:t>
+              <a:t>2023/2024</a:t>
             </a:r>
             <a:endParaRPr lang="en-US" sz="2000" dirty="0">
               <a:latin typeface="+mj-lt"/>

--- a/Course content/Slides/Topic 2 A ML project.pptx
+++ b/Course content/Slides/Topic 2 A ML project.pptx
@@ -133,6 +133,30 @@
 
 <file path=ppt/changesInfos/changesInfo1.xml><?xml version="1.0" encoding="utf-8"?>
 <pc:chgInfo xmlns:a="http://schemas.openxmlformats.org/drawingml/2006/main" xmlns:r="http://schemas.openxmlformats.org/officeDocument/2006/relationships" xmlns:ac="http://schemas.microsoft.com/office/drawing/2013/main/command" xmlns:pc="http://schemas.microsoft.com/office/powerpoint/2013/main/command">
+  <pc:docChgLst>
+    <pc:chgData name="Javier Bas Vicente" userId="96bf8a96-3310-496c-8c7e-8a087f977faa" providerId="ADAL" clId="{ECFCBE10-36E2-4FEA-A19A-7E1AACDC8971}"/>
+    <pc:docChg chg="modSld">
+      <pc:chgData name="Javier Bas Vicente" userId="96bf8a96-3310-496c-8c7e-8a087f977faa" providerId="ADAL" clId="{ECFCBE10-36E2-4FEA-A19A-7E1AACDC8971}" dt="2024-10-19T16:58:01.001" v="0" actId="20577"/>
+      <pc:docMkLst>
+        <pc:docMk/>
+      </pc:docMkLst>
+      <pc:sldChg chg="modSp mod">
+        <pc:chgData name="Javier Bas Vicente" userId="96bf8a96-3310-496c-8c7e-8a087f977faa" providerId="ADAL" clId="{ECFCBE10-36E2-4FEA-A19A-7E1AACDC8971}" dt="2024-10-19T16:58:01.001" v="0" actId="20577"/>
+        <pc:sldMkLst>
+          <pc:docMk/>
+          <pc:sldMk cId="2149080833" sldId="278"/>
+        </pc:sldMkLst>
+        <pc:spChg chg="mod">
+          <ac:chgData name="Javier Bas Vicente" userId="96bf8a96-3310-496c-8c7e-8a087f977faa" providerId="ADAL" clId="{ECFCBE10-36E2-4FEA-A19A-7E1AACDC8971}" dt="2024-10-19T16:58:01.001" v="0" actId="20577"/>
+          <ac:spMkLst>
+            <pc:docMk/>
+            <pc:sldMk cId="2149080833" sldId="278"/>
+            <ac:spMk id="3" creationId="{6866AA87-E000-52D2-F65D-4B414B00BBE5}"/>
+          </ac:spMkLst>
+        </pc:spChg>
+      </pc:sldChg>
+    </pc:docChg>
+  </pc:docChgLst>
   <pc:docChgLst>
     <pc:chgData name="Javier Bas Vicente" userId="96bf8a96-3310-496c-8c7e-8a087f977faa" providerId="ADAL" clId="{6D61AA64-0E28-439B-A63D-609F3C713282}"/>
     <pc:docChg chg="modSld">
@@ -307,7 +331,7 @@
           <a:p>
             <a:fld id="{A7DB5662-7327-465C-9A70-AD96B7A8D67A}" type="datetimeFigureOut">
               <a:rPr lang="en-US" smtClean="0"/>
-              <a:t>10/19/2023</a:t>
+              <a:t>10/19/2024</a:t>
             </a:fld>
             <a:endParaRPr lang="en-US"/>
           </a:p>
@@ -505,7 +529,7 @@
           <a:p>
             <a:fld id="{A7DB5662-7327-465C-9A70-AD96B7A8D67A}" type="datetimeFigureOut">
               <a:rPr lang="en-US" smtClean="0"/>
-              <a:t>10/19/2023</a:t>
+              <a:t>10/19/2024</a:t>
             </a:fld>
             <a:endParaRPr lang="en-US"/>
           </a:p>
@@ -713,7 +737,7 @@
           <a:p>
             <a:fld id="{A7DB5662-7327-465C-9A70-AD96B7A8D67A}" type="datetimeFigureOut">
               <a:rPr lang="en-US" smtClean="0"/>
-              <a:t>10/19/2023</a:t>
+              <a:t>10/19/2024</a:t>
             </a:fld>
             <a:endParaRPr lang="en-US"/>
           </a:p>
@@ -911,7 +935,7 @@
           <a:p>
             <a:fld id="{A7DB5662-7327-465C-9A70-AD96B7A8D67A}" type="datetimeFigureOut">
               <a:rPr lang="en-US" smtClean="0"/>
-              <a:t>10/19/2023</a:t>
+              <a:t>10/19/2024</a:t>
             </a:fld>
             <a:endParaRPr lang="en-US"/>
           </a:p>
@@ -1186,7 +1210,7 @@
           <a:p>
             <a:fld id="{A7DB5662-7327-465C-9A70-AD96B7A8D67A}" type="datetimeFigureOut">
               <a:rPr lang="en-US" smtClean="0"/>
-              <a:t>10/19/2023</a:t>
+              <a:t>10/19/2024</a:t>
             </a:fld>
             <a:endParaRPr lang="en-US"/>
           </a:p>
@@ -1451,7 +1475,7 @@
           <a:p>
             <a:fld id="{A7DB5662-7327-465C-9A70-AD96B7A8D67A}" type="datetimeFigureOut">
               <a:rPr lang="en-US" smtClean="0"/>
-              <a:t>10/19/2023</a:t>
+              <a:t>10/19/2024</a:t>
             </a:fld>
             <a:endParaRPr lang="en-US"/>
           </a:p>
@@ -1863,7 +1887,7 @@
           <a:p>
             <a:fld id="{A7DB5662-7327-465C-9A70-AD96B7A8D67A}" type="datetimeFigureOut">
               <a:rPr lang="en-US" smtClean="0"/>
-              <a:t>10/19/2023</a:t>
+              <a:t>10/19/2024</a:t>
             </a:fld>
             <a:endParaRPr lang="en-US"/>
           </a:p>
@@ -2004,7 +2028,7 @@
           <a:p>
             <a:fld id="{A7DB5662-7327-465C-9A70-AD96B7A8D67A}" type="datetimeFigureOut">
               <a:rPr lang="en-US" smtClean="0"/>
-              <a:t>10/19/2023</a:t>
+              <a:t>10/19/2024</a:t>
             </a:fld>
             <a:endParaRPr lang="en-US"/>
           </a:p>
@@ -2117,7 +2141,7 @@
           <a:p>
             <a:fld id="{A7DB5662-7327-465C-9A70-AD96B7A8D67A}" type="datetimeFigureOut">
               <a:rPr lang="en-US" smtClean="0"/>
-              <a:t>10/19/2023</a:t>
+              <a:t>10/19/2024</a:t>
             </a:fld>
             <a:endParaRPr lang="en-US"/>
           </a:p>
@@ -2428,7 +2452,7 @@
           <a:p>
             <a:fld id="{A7DB5662-7327-465C-9A70-AD96B7A8D67A}" type="datetimeFigureOut">
               <a:rPr lang="en-US" smtClean="0"/>
-              <a:t>10/19/2023</a:t>
+              <a:t>10/19/2024</a:t>
             </a:fld>
             <a:endParaRPr lang="en-US"/>
           </a:p>
@@ -2716,7 +2740,7 @@
           <a:p>
             <a:fld id="{A7DB5662-7327-465C-9A70-AD96B7A8D67A}" type="datetimeFigureOut">
               <a:rPr lang="en-US" smtClean="0"/>
-              <a:t>10/19/2023</a:t>
+              <a:t>10/19/2024</a:t>
             </a:fld>
             <a:endParaRPr lang="en-US"/>
           </a:p>
@@ -2957,7 +2981,7 @@
           <a:p>
             <a:fld id="{A7DB5662-7327-465C-9A70-AD96B7A8D67A}" type="datetimeFigureOut">
               <a:rPr lang="en-US" smtClean="0"/>
-              <a:t>10/19/2023</a:t>
+              <a:t>10/19/2024</a:t>
             </a:fld>
             <a:endParaRPr lang="en-US"/>
           </a:p>
@@ -3504,13 +3528,6 @@
             </a:r>
           </a:p>
           <a:p>
-            <a:r>
-              <a:rPr lang="es-ES" sz="2000">
-                <a:latin typeface="+mj-lt"/>
-                <a:cs typeface="Times New Roman" panose="02020603050405020304" pitchFamily="18" charset="0"/>
-              </a:rPr>
-              <a:t>2023/2024</a:t>
-            </a:r>
             <a:endParaRPr lang="en-US" sz="2000" dirty="0">
               <a:latin typeface="+mj-lt"/>
               <a:cs typeface="Times New Roman" panose="02020603050405020304" pitchFamily="18" charset="0"/>
